--- a/topic05-persistence-xml-exceptions/unit-05a-lectures/talk-2-CRUD-XML/b-CRUD-XML.pptx
+++ b/topic05-persistence-xml-exceptions/unit-05a-lectures/talk-2-CRUD-XML/b-CRUD-XML.pptx
@@ -34,7 +34,7 @@
     <p:sldId id="444" r:id="rId25"/>
     <p:sldId id="407" r:id="rId26"/>
     <p:sldId id="432" r:id="rId27"/>
-    <p:sldId id="392" r:id="rId28"/>
+    <p:sldId id="626" r:id="rId28"/>
   </p:sldIdLst>
   <p:sldSz cx="12192000" cy="6858000"/>
   <p:notesSz cx="6858000" cy="9144000"/>
@@ -234,7 +234,7 @@
           <a:p>
             <a:fld id="{56BC3C30-7F3D-4B20-9974-47C57B22CA6E}" type="datetimeFigureOut">
               <a:rPr lang="en-IE" smtClean="0"/>
-              <a:t>13/02/2024</a:t>
+              <a:t>10/02/2026</a:t>
             </a:fld>
             <a:endParaRPr lang="en-IE"/>
           </a:p>
@@ -1384,7 +1384,7 @@
             <a:fld id="{1D8BD707-D9CF-40AE-B4C6-C98DA3205C09}" type="datetimeFigureOut">
               <a:rPr lang="en-US" smtClean="0"/>
               <a:pPr/>
-              <a:t>2/13/2024</a:t>
+              <a:t>2/10/2026</a:t>
             </a:fld>
             <a:endParaRPr lang="en-US"/>
           </a:p>
@@ -1549,7 +1549,7 @@
             <a:fld id="{1D8BD707-D9CF-40AE-B4C6-C98DA3205C09}" type="datetimeFigureOut">
               <a:rPr lang="en-US" smtClean="0"/>
               <a:pPr/>
-              <a:t>2/13/2024</a:t>
+              <a:t>2/10/2026</a:t>
             </a:fld>
             <a:endParaRPr lang="en-US"/>
           </a:p>
@@ -1724,7 +1724,7 @@
             <a:fld id="{1D8BD707-D9CF-40AE-B4C6-C98DA3205C09}" type="datetimeFigureOut">
               <a:rPr lang="en-US" smtClean="0"/>
               <a:pPr/>
-              <a:t>2/13/2024</a:t>
+              <a:t>2/10/2026</a:t>
             </a:fld>
             <a:endParaRPr lang="en-US"/>
           </a:p>
@@ -1900,7 +1900,7 @@
             <a:fld id="{1D8BD707-D9CF-40AE-B4C6-C98DA3205C09}" type="datetimeFigureOut">
               <a:rPr lang="en-US" smtClean="0"/>
               <a:pPr/>
-              <a:t>2/13/2024</a:t>
+              <a:t>2/10/2026</a:t>
             </a:fld>
             <a:endParaRPr lang="en-US"/>
           </a:p>
@@ -2180,7 +2180,7 @@
             <a:fld id="{1D8BD707-D9CF-40AE-B4C6-C98DA3205C09}" type="datetimeFigureOut">
               <a:rPr lang="en-US" smtClean="0"/>
               <a:pPr/>
-              <a:t>2/13/2024</a:t>
+              <a:t>2/10/2026</a:t>
             </a:fld>
             <a:endParaRPr lang="en-US"/>
           </a:p>
@@ -2473,7 +2473,7 @@
             <a:fld id="{1D8BD707-D9CF-40AE-B4C6-C98DA3205C09}" type="datetimeFigureOut">
               <a:rPr lang="en-US" smtClean="0"/>
               <a:pPr/>
-              <a:t>2/13/2024</a:t>
+              <a:t>2/10/2026</a:t>
             </a:fld>
             <a:endParaRPr lang="en-US"/>
           </a:p>
@@ -2931,7 +2931,7 @@
             <a:fld id="{1D8BD707-D9CF-40AE-B4C6-C98DA3205C09}" type="datetimeFigureOut">
               <a:rPr lang="en-US" smtClean="0"/>
               <a:pPr/>
-              <a:t>2/13/2024</a:t>
+              <a:t>2/10/2026</a:t>
             </a:fld>
             <a:endParaRPr lang="en-US"/>
           </a:p>
@@ -3091,7 +3091,7 @@
             <a:fld id="{1D8BD707-D9CF-40AE-B4C6-C98DA3205C09}" type="datetimeFigureOut">
               <a:rPr lang="en-US" smtClean="0"/>
               <a:pPr/>
-              <a:t>2/13/2024</a:t>
+              <a:t>2/10/2026</a:t>
             </a:fld>
             <a:endParaRPr lang="en-US"/>
           </a:p>
@@ -3218,7 +3218,7 @@
             <a:fld id="{1D8BD707-D9CF-40AE-B4C6-C98DA3205C09}" type="datetimeFigureOut">
               <a:rPr lang="en-US" smtClean="0"/>
               <a:pPr/>
-              <a:t>2/13/2024</a:t>
+              <a:t>2/10/2026</a:t>
             </a:fld>
             <a:endParaRPr lang="en-US"/>
           </a:p>
@@ -3490,7 +3490,7 @@
             <a:fld id="{1D8BD707-D9CF-40AE-B4C6-C98DA3205C09}" type="datetimeFigureOut">
               <a:rPr lang="en-US" smtClean="0"/>
               <a:pPr/>
-              <a:t>2/13/2024</a:t>
+              <a:t>2/10/2026</a:t>
             </a:fld>
             <a:endParaRPr lang="en-US"/>
           </a:p>
@@ -3739,7 +3739,7 @@
             <a:fld id="{1D8BD707-D9CF-40AE-B4C6-C98DA3205C09}" type="datetimeFigureOut">
               <a:rPr lang="en-US" smtClean="0"/>
               <a:pPr/>
-              <a:t>2/13/2024</a:t>
+              <a:t>2/10/2026</a:t>
             </a:fld>
             <a:endParaRPr lang="en-US"/>
           </a:p>
@@ -3947,7 +3947,7 @@
             <a:fld id="{1D8BD707-D9CF-40AE-B4C6-C98DA3205C09}" type="datetimeFigureOut">
               <a:rPr lang="en-US" smtClean="0"/>
               <a:pPr/>
-              <a:t>2/13/2024</a:t>
+              <a:t>2/10/2026</a:t>
             </a:fld>
             <a:endParaRPr lang="en-US"/>
           </a:p>
@@ -4653,10 +4653,12 @@
                   </a:schemeClr>
                 </a:solidFill>
               </a:rPr>
-              <a:t> </a:t>
-            </a:r>
-            <a:r>
-              <a:rPr lang="en-IE" sz="2400" dirty="0" smtClean="0">
+              <a:t> Drohan</a:t>
+            </a:r>
+          </a:p>
+          <a:p>
+            <a:r>
+              <a:rPr lang="en-IE" sz="2400" dirty="0">
                 <a:solidFill>
                   <a:schemeClr val="tx1">
                     <a:lumMod val="75000"/>
@@ -4664,29 +4666,8 @@
                   </a:schemeClr>
                 </a:solidFill>
               </a:rPr>
-              <a:t>Drohan</a:t>
-            </a:r>
-          </a:p>
-          <a:p>
-            <a:r>
-              <a:rPr lang="en-IE" sz="2400" dirty="0" smtClean="0">
-                <a:solidFill>
-                  <a:schemeClr val="tx1">
-                    <a:lumMod val="75000"/>
-                    <a:lumOff val="25000"/>
-                  </a:schemeClr>
-                </a:solidFill>
-              </a:rPr>
               <a:t>Ms Siobhan Roche</a:t>
             </a:r>
-            <a:endParaRPr lang="en-IE" sz="2400" dirty="0">
-              <a:solidFill>
-                <a:schemeClr val="tx1">
-                  <a:lumMod val="75000"/>
-                  <a:lumOff val="25000"/>
-                </a:schemeClr>
-              </a:solidFill>
-            </a:endParaRPr>
           </a:p>
         </p:txBody>
       </p:sp>
@@ -5576,7 +5557,7 @@
                   <a:srgbClr val="FF0000"/>
                 </a:solidFill>
               </a:rPr>
-              <a:t>xstream-1.4.17.jar </a:t>
+              <a:t>xstream-1.4.21.jar </a:t>
             </a:r>
             <a:r>
               <a:rPr lang="en-IE" dirty="0"/>
@@ -6485,19 +6466,6 @@
               </a:rPr>
               <a:t>//1</a:t>
             </a:r>
-            <a:r>
-              <a:rPr kumimoji="0" lang="en-VI" altLang="en-VI" sz="2000" b="0" i="0" u="none" strike="noStrike" cap="none" normalizeH="0" baseline="0" dirty="0">
-                <a:ln>
-                  <a:noFill/>
-                </a:ln>
-                <a:solidFill>
-                  <a:srgbClr val="080808"/>
-                </a:solidFill>
-                <a:effectLst/>
-                <a:latin typeface="JetBrains Mono"/>
-              </a:rPr>
-              <a:t/>
-            </a:r>
             <a:br>
               <a:rPr kumimoji="0" lang="en-VI" altLang="en-VI" sz="2000" b="0" i="0" u="none" strike="noStrike" cap="none" normalizeH="0" baseline="0" dirty="0">
                 <a:ln>
@@ -6729,19 +6697,6 @@
               </a:rPr>
               <a:t>//2</a:t>
             </a:r>
-            <a:r>
-              <a:rPr kumimoji="0" lang="en-VI" altLang="en-VI" sz="2000" b="0" i="0" u="none" strike="noStrike" cap="none" normalizeH="0" baseline="0" dirty="0">
-                <a:ln>
-                  <a:noFill/>
-                </a:ln>
-                <a:solidFill>
-                  <a:srgbClr val="080808"/>
-                </a:solidFill>
-                <a:effectLst/>
-                <a:latin typeface="JetBrains Mono"/>
-              </a:rPr>
-              <a:t/>
-            </a:r>
             <a:br>
               <a:rPr kumimoji="0" lang="en-VI" altLang="en-VI" sz="2000" b="0" i="0" u="none" strike="noStrike" cap="none" normalizeH="0" baseline="0" dirty="0">
                 <a:ln>
@@ -6858,19 +6813,6 @@
               </a:rPr>
               <a:t>//3</a:t>
             </a:r>
-            <a:r>
-              <a:rPr kumimoji="0" lang="en-VI" altLang="en-VI" sz="2000" b="0" i="0" u="none" strike="noStrike" cap="none" normalizeH="0" baseline="0" dirty="0">
-                <a:ln>
-                  <a:noFill/>
-                </a:ln>
-                <a:solidFill>
-                  <a:srgbClr val="080808"/>
-                </a:solidFill>
-                <a:effectLst/>
-                <a:latin typeface="JetBrains Mono"/>
-              </a:rPr>
-              <a:t/>
-            </a:r>
             <a:br>
               <a:rPr kumimoji="0" lang="en-VI" altLang="en-VI" sz="2000" b="0" i="0" u="none" strike="noStrike" cap="none" normalizeH="0" baseline="0" dirty="0">
                 <a:ln>
@@ -6960,19 +6902,6 @@
                 <a:latin typeface="JetBrains Mono"/>
               </a:rPr>
               <a:t>//4</a:t>
-            </a:r>
-            <a:r>
-              <a:rPr kumimoji="0" lang="en-VI" altLang="en-VI" sz="2000" b="0" i="0" u="none" strike="noStrike" cap="none" normalizeH="0" baseline="0" dirty="0">
-                <a:ln>
-                  <a:noFill/>
-                </a:ln>
-                <a:solidFill>
-                  <a:srgbClr val="080808"/>
-                </a:solidFill>
-                <a:effectLst/>
-                <a:latin typeface="JetBrains Mono"/>
-              </a:rPr>
-              <a:t/>
             </a:r>
             <a:br>
               <a:rPr kumimoji="0" lang="en-VI" altLang="en-VI" sz="2000" b="0" i="0" u="none" strike="noStrike" cap="none" normalizeH="0" baseline="0" dirty="0">
@@ -8118,19 +8047,6 @@
               </a:rPr>
               <a:t>//1</a:t>
             </a:r>
-            <a:r>
-              <a:rPr kumimoji="0" lang="en-VI" altLang="en-VI" sz="1600" b="0" i="0" u="none" strike="noStrike" cap="none" normalizeH="0" baseline="0" dirty="0">
-                <a:ln>
-                  <a:noFill/>
-                </a:ln>
-                <a:solidFill>
-                  <a:srgbClr val="080808"/>
-                </a:solidFill>
-                <a:effectLst/>
-                <a:latin typeface="JetBrains Mono"/>
-              </a:rPr>
-              <a:t/>
-            </a:r>
             <a:br>
               <a:rPr kumimoji="0" lang="en-VI" altLang="en-VI" sz="1600" b="0" i="0" u="none" strike="noStrike" cap="none" normalizeH="0" baseline="0" dirty="0">
                 <a:ln>
@@ -8143,19 +8059,6 @@
                 <a:latin typeface="JetBrains Mono"/>
               </a:rPr>
             </a:br>
-            <a:r>
-              <a:rPr kumimoji="0" lang="en-VI" altLang="en-VI" sz="1600" b="0" i="0" u="none" strike="noStrike" cap="none" normalizeH="0" baseline="0" dirty="0">
-                <a:ln>
-                  <a:noFill/>
-                </a:ln>
-                <a:solidFill>
-                  <a:srgbClr val="080808"/>
-                </a:solidFill>
-                <a:effectLst/>
-                <a:latin typeface="JetBrains Mono"/>
-              </a:rPr>
-              <a:t/>
-            </a:r>
             <a:br>
               <a:rPr kumimoji="0" lang="en-VI" altLang="en-VI" sz="1600" b="0" i="0" u="none" strike="noStrike" cap="none" normalizeH="0" baseline="0" dirty="0">
                 <a:ln>
@@ -8401,19 +8304,6 @@
               </a:rPr>
               <a:t>    </a:t>
             </a:r>
-            <a:r>
-              <a:rPr kumimoji="0" lang="en-VI" altLang="en-VI" sz="1600" b="0" i="0" u="none" strike="noStrike" cap="none" normalizeH="0" baseline="0" dirty="0">
-                <a:ln>
-                  <a:noFill/>
-                </a:ln>
-                <a:solidFill>
-                  <a:srgbClr val="080808"/>
-                </a:solidFill>
-                <a:effectLst/>
-                <a:latin typeface="JetBrains Mono"/>
-              </a:rPr>
-              <a:t/>
-            </a:r>
             <a:br>
               <a:rPr kumimoji="0" lang="en-VI" altLang="en-VI" sz="1600" b="0" i="0" u="none" strike="noStrike" cap="none" normalizeH="0" baseline="0" dirty="0">
                 <a:ln>
@@ -8556,19 +8446,6 @@
               </a:rPr>
               <a:t>       </a:t>
             </a:r>
-            <a:r>
-              <a:rPr kumimoji="0" lang="en-VI" altLang="en-VI" sz="1600" b="0" i="0" u="none" strike="noStrike" cap="none" normalizeH="0" baseline="0" dirty="0">
-                <a:ln>
-                  <a:noFill/>
-                </a:ln>
-                <a:solidFill>
-                  <a:srgbClr val="080808"/>
-                </a:solidFill>
-                <a:effectLst/>
-                <a:latin typeface="JetBrains Mono"/>
-              </a:rPr>
-              <a:t/>
-            </a:r>
             <a:br>
               <a:rPr kumimoji="0" lang="en-VI" altLang="en-VI" sz="1600" b="0" i="0" u="none" strike="noStrike" cap="none" normalizeH="0" baseline="0" dirty="0">
                 <a:ln>
@@ -8671,19 +8548,6 @@
                 <a:latin typeface="JetBrains Mono"/>
               </a:rPr>
             </a:br>
-            <a:r>
-              <a:rPr kumimoji="0" lang="en-VI" altLang="en-VI" sz="1600" b="0" i="0" u="none" strike="noStrike" cap="none" normalizeH="0" baseline="0" dirty="0">
-                <a:ln>
-                  <a:noFill/>
-                </a:ln>
-                <a:solidFill>
-                  <a:srgbClr val="080808"/>
-                </a:solidFill>
-                <a:effectLst/>
-                <a:latin typeface="JetBrains Mono"/>
-              </a:rPr>
-              <a:t/>
-            </a:r>
             <a:br>
               <a:rPr kumimoji="0" lang="en-VI" altLang="en-VI" sz="1600" b="0" i="0" u="none" strike="noStrike" cap="none" normalizeH="0" baseline="0" dirty="0">
                 <a:ln>
@@ -8916,19 +8780,6 @@
               </a:rPr>
               <a:t>//3</a:t>
             </a:r>
-            <a:r>
-              <a:rPr kumimoji="0" lang="en-VI" altLang="en-VI" sz="1600" b="0" i="0" u="none" strike="noStrike" cap="none" normalizeH="0" baseline="0" dirty="0">
-                <a:ln>
-                  <a:noFill/>
-                </a:ln>
-                <a:solidFill>
-                  <a:srgbClr val="080808"/>
-                </a:solidFill>
-                <a:effectLst/>
-                <a:latin typeface="JetBrains Mono"/>
-              </a:rPr>
-              <a:t/>
-            </a:r>
             <a:br>
               <a:rPr kumimoji="0" lang="en-VI" altLang="en-VI" sz="1600" b="0" i="0" u="none" strike="noStrike" cap="none" normalizeH="0" baseline="0" dirty="0">
                 <a:ln>
@@ -9097,19 +8948,6 @@
               </a:rPr>
               <a:t>//4</a:t>
             </a:r>
-            <a:r>
-              <a:rPr kumimoji="0" lang="en-VI" altLang="en-VI" sz="1600" b="0" i="0" u="none" strike="noStrike" cap="none" normalizeH="0" baseline="0" dirty="0">
-                <a:ln>
-                  <a:noFill/>
-                </a:ln>
-                <a:solidFill>
-                  <a:srgbClr val="080808"/>
-                </a:solidFill>
-                <a:effectLst/>
-                <a:latin typeface="JetBrains Mono"/>
-              </a:rPr>
-              <a:t/>
-            </a:r>
             <a:br>
               <a:rPr kumimoji="0" lang="en-VI" altLang="en-VI" sz="1600" b="0" i="0" u="none" strike="noStrike" cap="none" normalizeH="0" baseline="0" dirty="0">
                 <a:ln>
@@ -9199,19 +9037,6 @@
                 <a:latin typeface="JetBrains Mono"/>
               </a:rPr>
               <a:t>//5</a:t>
-            </a:r>
-            <a:r>
-              <a:rPr kumimoji="0" lang="en-VI" altLang="en-VI" sz="1600" b="0" i="0" u="none" strike="noStrike" cap="none" normalizeH="0" baseline="0" dirty="0">
-                <a:ln>
-                  <a:noFill/>
-                </a:ln>
-                <a:solidFill>
-                  <a:srgbClr val="080808"/>
-                </a:solidFill>
-                <a:effectLst/>
-                <a:latin typeface="JetBrains Mono"/>
-              </a:rPr>
-              <a:t/>
             </a:r>
             <a:br>
               <a:rPr kumimoji="0" lang="en-VI" altLang="en-VI" sz="1600" b="0" i="0" u="none" strike="noStrike" cap="none" normalizeH="0" baseline="0" dirty="0">
@@ -10732,19 +10557,6 @@
                 <a:latin typeface="JetBrains Mono"/>
               </a:rPr>
             </a:br>
-            <a:r>
-              <a:rPr kumimoji="0" lang="en-VI" altLang="en-VI" sz="2000" b="0" i="0" u="none" strike="noStrike" cap="none" normalizeH="0" baseline="0" dirty="0">
-                <a:ln>
-                  <a:noFill/>
-                </a:ln>
-                <a:solidFill>
-                  <a:srgbClr val="080808"/>
-                </a:solidFill>
-                <a:effectLst/>
-                <a:latin typeface="JetBrains Mono"/>
-              </a:rPr>
-              <a:t/>
-            </a:r>
             <a:br>
               <a:rPr kumimoji="0" lang="en-VI" altLang="en-VI" sz="2000" b="0" i="0" u="none" strike="noStrike" cap="none" normalizeH="0" baseline="0" dirty="0">
                 <a:ln>
@@ -11635,7 +11447,7 @@
                 <a16:creationId xmlns:a16="http://schemas.microsoft.com/office/drawing/2014/main" id="{C7F55EAC-550A-4BDD-9099-3F20B8FA0EBC}"/>
               </a:ext>
               <a:ext uri="{C183D7F6-B498-43B3-948B-1728B52AA6E4}">
-                <adec:decorative xmlns:adec="http://schemas.microsoft.com/office/drawing/2017/decorative" xmlns="" val="1"/>
+                <adec:decorative xmlns:adec="http://schemas.microsoft.com/office/drawing/2017/decorative" val="1"/>
               </a:ext>
             </a:extLst>
           </p:cNvPr>
@@ -11695,7 +11507,7 @@
                 <a16:creationId xmlns:a16="http://schemas.microsoft.com/office/drawing/2014/main" id="{DC4F5A5F-493F-49AE-89B6-D5AF5EBC8B0E}"/>
               </a:ext>
               <a:ext uri="{C183D7F6-B498-43B3-948B-1728B52AA6E4}">
-                <adec:decorative xmlns:adec="http://schemas.microsoft.com/office/drawing/2017/decorative" xmlns="" val="1"/>
+                <adec:decorative xmlns:adec="http://schemas.microsoft.com/office/drawing/2017/decorative" val="1"/>
               </a:ext>
             </a:extLst>
           </p:cNvPr>
@@ -16739,11 +16551,39 @@
           <a:chExt cx="0" cy="0"/>
         </a:xfrm>
       </p:grpSpPr>
+      <p:sp>
+        <p:nvSpPr>
+          <p:cNvPr id="2" name="Title 1"/>
+          <p:cNvSpPr>
+            <a:spLocks noGrp="1"/>
+          </p:cNvSpPr>
+          <p:nvPr>
+            <p:ph type="title"/>
+          </p:nvPr>
+        </p:nvSpPr>
+        <p:spPr/>
+        <p:txBody>
+          <a:bodyPr/>
+          <a:lstStyle/>
+          <a:p>
+            <a:r>
+              <a:rPr lang="en-IE" dirty="0"/>
+              <a:t>Questions?</a:t>
+            </a:r>
+          </a:p>
+        </p:txBody>
+      </p:sp>
       <p:pic>
         <p:nvPicPr>
-          <p:cNvPr id="8194" name="Picture 2" descr="C:\Users\Siobhan\AppData\Local\Microsoft\Windows\Temporary Internet Files\Content.IE5\D6SFLNVW\questions-2[1].jpg"/>
+          <p:cNvPr id="3" name="Picture 2" descr="A green question mark in a circle&#10;&#10;AI-generated content may be incorrect.">
+            <a:extLst>
+              <a:ext uri="{FF2B5EF4-FFF2-40B4-BE49-F238E27FC236}">
+                <a16:creationId xmlns:a16="http://schemas.microsoft.com/office/drawing/2014/main" id="{5A9D487F-3157-9FE9-7E30-C739B06EAF9D}"/>
+              </a:ext>
+            </a:extLst>
+          </p:cNvPr>
           <p:cNvPicPr>
-            <a:picLocks noChangeAspect="1" noChangeArrowheads="1"/>
+            <a:picLocks noChangeAspect="1"/>
           </p:cNvPicPr>
           <p:nvPr/>
         </p:nvPicPr>
@@ -16755,113 +16595,25 @@
               </a:ext>
             </a:extLst>
           </a:blip>
-          <a:srcRect/>
           <a:stretch>
             <a:fillRect/>
           </a:stretch>
         </p:blipFill>
-        <p:spPr bwMode="auto">
-          <a:xfrm>
-            <a:off x="5416203" y="1244600"/>
-            <a:ext cx="4394200" cy="4394200"/>
-          </a:xfrm>
-          <a:prstGeom prst="rect">
-            <a:avLst/>
-          </a:prstGeom>
-          <a:noFill/>
-          <a:extLst>
-            <a:ext uri="{909E8E84-426E-40DD-AFC4-6F175D3DCCD1}">
-              <a14:hiddenFill xmlns:a14="http://schemas.microsoft.com/office/drawing/2010/main">
-                <a:solidFill>
-                  <a:srgbClr val="FFFFFF"/>
-                </a:solidFill>
-              </a14:hiddenFill>
-            </a:ext>
-          </a:extLst>
-        </p:spPr>
-      </p:pic>
-      <p:sp>
-        <p:nvSpPr>
-          <p:cNvPr id="2" name="Rectangle 1"/>
-          <p:cNvSpPr/>
-          <p:nvPr/>
-        </p:nvSpPr>
         <p:spPr>
           <a:xfrm>
-            <a:off x="2438401" y="2614474"/>
-            <a:ext cx="3485803" cy="1754326"/>
+            <a:off x="3833019" y="1166019"/>
+            <a:ext cx="4525963" cy="4525963"/>
           </a:xfrm>
           <a:prstGeom prst="rect">
             <a:avLst/>
           </a:prstGeom>
           <a:noFill/>
         </p:spPr>
-        <p:txBody>
-          <a:bodyPr wrap="square" lIns="91440" tIns="45720" rIns="91440" bIns="45720">
-            <a:spAutoFit/>
-            <a:scene3d>
-              <a:camera prst="orthographicFront"/>
-              <a:lightRig rig="flat" dir="tl">
-                <a:rot lat="0" lon="0" rev="6600000"/>
-              </a:lightRig>
-            </a:scene3d>
-            <a:sp3d extrusionH="25400" contourW="8890">
-              <a:bevelT w="38100" h="31750"/>
-              <a:contourClr>
-                <a:schemeClr val="accent2">
-                  <a:shade val="75000"/>
-                </a:schemeClr>
-              </a:contourClr>
-            </a:sp3d>
-          </a:bodyPr>
-          <a:lstStyle/>
-          <a:p>
-            <a:pPr algn="ctr"/>
-            <a:r>
-              <a:rPr lang="en-US" sz="5400" b="1" dirty="0">
-                <a:ln w="11430"/>
-                <a:gradFill>
-                  <a:gsLst>
-                    <a:gs pos="0">
-                      <a:schemeClr val="accent2">
-                        <a:tint val="70000"/>
-                        <a:satMod val="245000"/>
-                      </a:schemeClr>
-                    </a:gs>
-                    <a:gs pos="75000">
-                      <a:schemeClr val="accent2">
-                        <a:tint val="90000"/>
-                        <a:shade val="60000"/>
-                        <a:satMod val="240000"/>
-                      </a:schemeClr>
-                    </a:gs>
-                    <a:gs pos="100000">
-                      <a:schemeClr val="accent2">
-                        <a:tint val="100000"/>
-                        <a:shade val="50000"/>
-                        <a:satMod val="240000"/>
-                      </a:schemeClr>
-                    </a:gs>
-                  </a:gsLst>
-                  <a:lin ang="5400000"/>
-                </a:gradFill>
-                <a:effectLst>
-                  <a:outerShdw blurRad="50800" dist="39000" dir="5460000" algn="tl">
-                    <a:srgbClr val="000000">
-                      <a:alpha val="38000"/>
-                    </a:srgbClr>
-                  </a:outerShdw>
-                </a:effectLst>
-              </a:rPr>
-              <a:t>Any Questions?</a:t>
-            </a:r>
-          </a:p>
-        </p:txBody>
-      </p:sp>
+      </p:pic>
     </p:spTree>
     <p:extLst>
       <p:ext uri="{BB962C8B-B14F-4D97-AF65-F5344CB8AC3E}">
-        <p14:creationId xmlns:p14="http://schemas.microsoft.com/office/powerpoint/2010/main" val="1150381320"/>
+        <p14:creationId xmlns:p14="http://schemas.microsoft.com/office/powerpoint/2010/main" val="1061480252"/>
       </p:ext>
     </p:extLst>
   </p:cSld>
@@ -18161,12 +17913,12 @@
               <a:t>Download the </a:t>
             </a:r>
             <a:r>
-              <a:rPr lang="en-IE" b="1" dirty="0" smtClean="0">
+              <a:rPr lang="en-IE" b="1" dirty="0">
                 <a:solidFill>
                   <a:srgbClr val="FF0000"/>
                 </a:solidFill>
               </a:rPr>
-              <a:t>xstream-1.4.20.jar </a:t>
+              <a:t>xstream-1.4.21.jar </a:t>
             </a:r>
             <a:r>
               <a:rPr lang="en-IE" dirty="0"/>
@@ -18617,30 +18369,6 @@
           <a:chExt cx="0" cy="0"/>
         </a:xfrm>
       </p:grpSpPr>
-      <p:pic>
-        <p:nvPicPr>
-          <p:cNvPr id="3" name="Picture 2"/>
-          <p:cNvPicPr>
-            <a:picLocks noChangeAspect="1"/>
-          </p:cNvPicPr>
-          <p:nvPr/>
-        </p:nvPicPr>
-        <p:blipFill>
-          <a:blip r:embed="rId3"/>
-          <a:stretch>
-            <a:fillRect/>
-          </a:stretch>
-        </p:blipFill>
-        <p:spPr>
-          <a:xfrm>
-            <a:off x="2132239" y="1382806"/>
-            <a:ext cx="6934200" cy="5034615"/>
-          </a:xfrm>
-          <a:prstGeom prst="rect">
-            <a:avLst/>
-          </a:prstGeom>
-        </p:spPr>
-      </p:pic>
       <p:sp>
         <p:nvSpPr>
           <p:cNvPr id="2" name="Title 1">
@@ -18704,16 +18432,41 @@
           <a:p>
             <a:r>
               <a:rPr lang="en-IE" dirty="0"/>
-              <a:t>https://</a:t>
-            </a:r>
-            <a:r>
-              <a:rPr lang="en-IE" dirty="0" smtClean="0"/>
-              <a:t>mvnrepository.com/artifact/com.thoughtworks.xstream/xstream/1.4.20  </a:t>
-            </a:r>
-            <a:endParaRPr lang="en-IE" dirty="0"/>
+              <a:t>https://mvnrepository.com/artifact/com.thoughtworks.xstream/xstream/1.4.21  </a:t>
+            </a:r>
           </a:p>
         </p:txBody>
       </p:sp>
+      <p:pic>
+        <p:nvPicPr>
+          <p:cNvPr id="6" name="Picture 5">
+            <a:extLst>
+              <a:ext uri="{FF2B5EF4-FFF2-40B4-BE49-F238E27FC236}">
+                <a16:creationId xmlns:a16="http://schemas.microsoft.com/office/drawing/2014/main" id="{8E4423AB-F416-0C07-DF3E-66430458B994}"/>
+              </a:ext>
+            </a:extLst>
+          </p:cNvPr>
+          <p:cNvPicPr>
+            <a:picLocks noChangeAspect="1"/>
+          </p:cNvPicPr>
+          <p:nvPr/>
+        </p:nvPicPr>
+        <p:blipFill>
+          <a:blip r:embed="rId3"/>
+          <a:stretch>
+            <a:fillRect/>
+          </a:stretch>
+        </p:blipFill>
+        <p:spPr>
+          <a:xfrm>
+            <a:off x="2133600" y="1219200"/>
+            <a:ext cx="7559695" cy="5082980"/>
+          </a:xfrm>
+          <a:prstGeom prst="rect">
+            <a:avLst/>
+          </a:prstGeom>
+        </p:spPr>
+      </p:pic>
       <p:cxnSp>
         <p:nvCxnSpPr>
           <p:cNvPr id="7" name="Straight Arrow Connector 6">
@@ -18730,8 +18483,8 @@
         </p:nvCxnSpPr>
         <p:spPr>
           <a:xfrm flipH="1">
-            <a:off x="6934200" y="3429000"/>
-            <a:ext cx="868134" cy="1779675"/>
+            <a:off x="5057235" y="3429000"/>
+            <a:ext cx="2745099" cy="1313706"/>
           </a:xfrm>
           <a:prstGeom prst="straightConnector1">
             <a:avLst/>
@@ -18801,16 +18554,12 @@
               <a:t>Download the </a:t>
             </a:r>
             <a:r>
-              <a:rPr lang="en-IE" sz="2400" b="1" dirty="0" smtClean="0"/>
-              <a:t>xstream-1.4.20.jar</a:t>
-            </a:r>
-            <a:r>
-              <a:rPr lang="en-IE" sz="2400" dirty="0" smtClean="0"/>
-              <a:t> </a:t>
+              <a:rPr lang="en-IE" sz="2400" b="1" dirty="0"/>
+              <a:t>xstream-1.4.21.jar</a:t>
             </a:r>
             <a:r>
               <a:rPr lang="en-IE" sz="2400" dirty="0"/>
-              <a:t>component. </a:t>
+              <a:t> component. </a:t>
             </a:r>
           </a:p>
         </p:txBody>
@@ -18823,7 +18572,7 @@
         </p:nvSpPr>
         <p:spPr>
           <a:xfrm flipV="1">
-            <a:off x="6329394" y="5257799"/>
+            <a:off x="4147630" y="4742706"/>
             <a:ext cx="909605" cy="304800"/>
           </a:xfrm>
           <a:prstGeom prst="donut">
@@ -19114,10 +18863,6 @@
           <a:lstStyle/>
           <a:p>
             <a:pPr algn="ctr"/>
-            <a:r>
-              <a:rPr lang="en-IE" sz="2400" dirty="0"/>
-              <a:t/>
-            </a:r>
             <a:br>
               <a:rPr lang="en-IE" sz="2400" dirty="0"/>
             </a:br>
@@ -20193,14 +19938,13 @@
           <a:p>
             <a:pPr algn="ctr"/>
             <a:r>
-              <a:rPr lang="en-IE" sz="2400" b="1" dirty="0" smtClean="0"/>
-              <a:t>xstream-1.4.20.jar</a:t>
-            </a:r>
-            <a:r>
-              <a:rPr lang="en-IE" sz="2400" dirty="0" smtClean="0"/>
+              <a:rPr lang="en-IE" sz="2400" b="1" dirty="0"/>
+              <a:t>xstream-1.4.21.jar</a:t>
+            </a:r>
+            <a:r>
+              <a:rPr lang="en-IE" sz="2400" dirty="0"/>
               <a:t> </a:t>
             </a:r>
-            <a:endParaRPr lang="en-IE" sz="2400" dirty="0"/>
           </a:p>
           <a:p>
             <a:pPr algn="ctr"/>
